--- a/中越詩歌/朝賀耶穌降生_Hỡi Môn Ðồ Trung Tín.pptx
+++ b/中越詩歌/朝賀耶穌降生_Hỡi Môn Ðồ Trung Tín.pptx
@@ -332,7 +332,7 @@
           <a:p>
             <a:fld id="{C78A503C-B20E-45F1-BB07-F108CF77DE89}" type="datetimeFigureOut">
               <a:rPr lang="en-US" smtClean="0"/>
-              <a:t>12/23/2023</a:t>
+              <a:t>12/17/2024</a:t>
             </a:fld>
             <a:endParaRPr lang="en-US"/>
           </a:p>
@@ -502,7 +502,7 @@
           <a:p>
             <a:fld id="{C78A503C-B20E-45F1-BB07-F108CF77DE89}" type="datetimeFigureOut">
               <a:rPr lang="en-US" smtClean="0"/>
-              <a:t>12/23/2023</a:t>
+              <a:t>12/17/2024</a:t>
             </a:fld>
             <a:endParaRPr lang="en-US"/>
           </a:p>
@@ -682,7 +682,7 @@
           <a:p>
             <a:fld id="{C78A503C-B20E-45F1-BB07-F108CF77DE89}" type="datetimeFigureOut">
               <a:rPr lang="en-US" smtClean="0"/>
-              <a:t>12/23/2023</a:t>
+              <a:t>12/17/2024</a:t>
             </a:fld>
             <a:endParaRPr lang="en-US"/>
           </a:p>
@@ -852,7 +852,7 @@
           <a:p>
             <a:fld id="{C78A503C-B20E-45F1-BB07-F108CF77DE89}" type="datetimeFigureOut">
               <a:rPr lang="en-US" smtClean="0"/>
-              <a:t>12/23/2023</a:t>
+              <a:t>12/17/2024</a:t>
             </a:fld>
             <a:endParaRPr lang="en-US"/>
           </a:p>
@@ -1098,7 +1098,7 @@
           <a:p>
             <a:fld id="{C78A503C-B20E-45F1-BB07-F108CF77DE89}" type="datetimeFigureOut">
               <a:rPr lang="en-US" smtClean="0"/>
-              <a:t>12/23/2023</a:t>
+              <a:t>12/17/2024</a:t>
             </a:fld>
             <a:endParaRPr lang="en-US"/>
           </a:p>
@@ -1386,7 +1386,7 @@
           <a:p>
             <a:fld id="{C78A503C-B20E-45F1-BB07-F108CF77DE89}" type="datetimeFigureOut">
               <a:rPr lang="en-US" smtClean="0"/>
-              <a:t>12/23/2023</a:t>
+              <a:t>12/17/2024</a:t>
             </a:fld>
             <a:endParaRPr lang="en-US"/>
           </a:p>
@@ -1808,7 +1808,7 @@
           <a:p>
             <a:fld id="{C78A503C-B20E-45F1-BB07-F108CF77DE89}" type="datetimeFigureOut">
               <a:rPr lang="en-US" smtClean="0"/>
-              <a:t>12/23/2023</a:t>
+              <a:t>12/17/2024</a:t>
             </a:fld>
             <a:endParaRPr lang="en-US"/>
           </a:p>
@@ -1926,7 +1926,7 @@
           <a:p>
             <a:fld id="{C78A503C-B20E-45F1-BB07-F108CF77DE89}" type="datetimeFigureOut">
               <a:rPr lang="en-US" smtClean="0"/>
-              <a:t>12/23/2023</a:t>
+              <a:t>12/17/2024</a:t>
             </a:fld>
             <a:endParaRPr lang="en-US"/>
           </a:p>
@@ -2021,7 +2021,7 @@
           <a:p>
             <a:fld id="{C78A503C-B20E-45F1-BB07-F108CF77DE89}" type="datetimeFigureOut">
               <a:rPr lang="en-US" smtClean="0"/>
-              <a:t>12/23/2023</a:t>
+              <a:t>12/17/2024</a:t>
             </a:fld>
             <a:endParaRPr lang="en-US"/>
           </a:p>
@@ -2298,7 +2298,7 @@
           <a:p>
             <a:fld id="{C78A503C-B20E-45F1-BB07-F108CF77DE89}" type="datetimeFigureOut">
               <a:rPr lang="en-US" smtClean="0"/>
-              <a:t>12/23/2023</a:t>
+              <a:t>12/17/2024</a:t>
             </a:fld>
             <a:endParaRPr lang="en-US"/>
           </a:p>
@@ -2555,7 +2555,7 @@
           <a:p>
             <a:fld id="{C78A503C-B20E-45F1-BB07-F108CF77DE89}" type="datetimeFigureOut">
               <a:rPr lang="en-US" smtClean="0"/>
-              <a:t>12/23/2023</a:t>
+              <a:t>12/17/2024</a:t>
             </a:fld>
             <a:endParaRPr lang="en-US"/>
           </a:p>
@@ -2771,7 +2771,7 @@
           <a:p>
             <a:fld id="{C78A503C-B20E-45F1-BB07-F108CF77DE89}" type="datetimeFigureOut">
               <a:rPr lang="en-US" smtClean="0"/>
-              <a:t>12/23/2023</a:t>
+              <a:t>12/17/2024</a:t>
             </a:fld>
             <a:endParaRPr lang="en-US"/>
           </a:p>
@@ -5395,7 +5395,23 @@
                   <a:srgbClr val="000066"/>
                 </a:solidFill>
               </a:rPr>
-              <a:t>( x2 )</a:t>
+              <a:t>( 2 </a:t>
+            </a:r>
+            <a:r>
+              <a:rPr lang="zh-CN" altLang="en-US" sz="3200" b="1" dirty="0">
+                <a:solidFill>
+                  <a:srgbClr val="000066"/>
+                </a:solidFill>
+              </a:rPr>
+              <a:t>次</a:t>
+            </a:r>
+            <a:r>
+              <a:rPr lang="en-US" sz="3200" b="1" dirty="0">
+                <a:solidFill>
+                  <a:srgbClr val="000066"/>
+                </a:solidFill>
+              </a:rPr>
+              <a:t> )</a:t>
             </a:r>
             <a:endParaRPr lang="vi-VN" sz="3200" b="1" dirty="0">
               <a:solidFill>
@@ -8664,7 +8680,23 @@
                   <a:srgbClr val="000066"/>
                 </a:solidFill>
               </a:rPr>
-              <a:t>( x2 )</a:t>
+              <a:t>( 2 </a:t>
+            </a:r>
+            <a:r>
+              <a:rPr lang="zh-CN" altLang="en-US" sz="3200" b="1" dirty="0">
+                <a:solidFill>
+                  <a:srgbClr val="000066"/>
+                </a:solidFill>
+              </a:rPr>
+              <a:t>次</a:t>
+            </a:r>
+            <a:r>
+              <a:rPr lang="en-US" sz="3200" b="1" dirty="0">
+                <a:solidFill>
+                  <a:srgbClr val="000066"/>
+                </a:solidFill>
+              </a:rPr>
+              <a:t> )</a:t>
             </a:r>
             <a:endParaRPr lang="vi-VN" sz="3200" b="1" dirty="0">
               <a:solidFill>
@@ -11561,7 +11593,23 @@
                   <a:srgbClr val="000066"/>
                 </a:solidFill>
               </a:rPr>
-              <a:t>( x2 )</a:t>
+              <a:t>( 2 </a:t>
+            </a:r>
+            <a:r>
+              <a:rPr lang="zh-CN" altLang="en-US" sz="3200" b="1" dirty="0">
+                <a:solidFill>
+                  <a:srgbClr val="000066"/>
+                </a:solidFill>
+              </a:rPr>
+              <a:t>次</a:t>
+            </a:r>
+            <a:r>
+              <a:rPr lang="en-US" sz="3200" b="1" dirty="0">
+                <a:solidFill>
+                  <a:srgbClr val="000066"/>
+                </a:solidFill>
+              </a:rPr>
+              <a:t> )</a:t>
             </a:r>
             <a:endParaRPr lang="vi-VN" sz="3200" b="1" dirty="0">
               <a:solidFill>
@@ -14058,7 +14106,23 @@
                   <a:srgbClr val="000066"/>
                 </a:solidFill>
               </a:rPr>
-              <a:t>( x2 )</a:t>
+              <a:t>( 2 </a:t>
+            </a:r>
+            <a:r>
+              <a:rPr lang="zh-CN" altLang="en-US" sz="3200" b="1" dirty="0">
+                <a:solidFill>
+                  <a:srgbClr val="000066"/>
+                </a:solidFill>
+              </a:rPr>
+              <a:t>次</a:t>
+            </a:r>
+            <a:r>
+              <a:rPr lang="en-US" sz="3200" b="1" dirty="0">
+                <a:solidFill>
+                  <a:srgbClr val="000066"/>
+                </a:solidFill>
+              </a:rPr>
+              <a:t> )</a:t>
             </a:r>
             <a:endParaRPr lang="vi-VN" sz="3200" b="1" dirty="0">
               <a:solidFill>
